--- a/docs/migration-orders/memory-system-deck.pptx
+++ b/docs/migration-orders/memory-system-deck.pptx
@@ -514,7 +514,7 @@
           <a:p>
             <a:r>
               <a:rPr lang="en-US" dirty="0"/>
-              <a:t>Companion to the main migration deck, expanding slide 14 ('Documents are the only memory'): the systematic view of how the six files cooperate.</a:t>
+              <a:t>Companion to the main migration deck, expanding slide 14 ('Documents are the only memory'): the systematic view of how the seven files cooperate.</a:t>
             </a:r>
             <a:endParaRPr lang="en-US" dirty="0"/>
           </a:p>
